--- a/prompter-moscow/presentation/prompter-home.pptx
+++ b/prompter-moscow/presentation/prompter-home.pptx
@@ -5579,7 +5579,7 @@
                 <a:latin typeface="MiSans"/>
                 <a:ea typeface="MiSans"/>
               </a:rPr>
-              <a:t>Технология берёт на себя полный цикл GEO- и SEO-продвижения: создаёт контент о вашем салоне и товарах для дома и автоматически публикует его на отечественных площадках. Цифровой след наращивается каждый день — его считывают нейросети и поисковики.</a:t>
+              <a:t>Технология берёт на себя полный цикл GEO- и SEO-продвижения: создаёт контент о вашем салоне и товарах для дома и автоматически публикует его на шести площадках. Цифровой след наращивается каждый день — его считывают нейросети и поисковики.</a:t>
             </a:r>
             <a:endParaRPr lang="en-US" sz="1400"/>
           </a:p>
@@ -6864,7 +6864,7 @@
                 <a:latin typeface="MiSans"/>
                 <a:ea typeface="MiSans"/>
               </a:rPr>
-              <a:t>Материалы автоматически выходят на отечественных площадках 5 дней в неделю</a:t>
+              <a:t>Материалы автоматически выходят на шести площадках 5 дней в неделю</a:t>
             </a:r>
             <a:endParaRPr lang="en-US" sz="1100"/>
           </a:p>
@@ -9882,7 +9882,7 @@
                 <a:latin typeface="MiSans"/>
                 <a:ea typeface="MiSans"/>
               </a:rPr>
-              <a:t>4 отечественные площадки</a:t>
+              <a:t>6 площадок для публикаций</a:t>
             </a:r>
             <a:endParaRPr lang="en-US" sz="1350"/>
           </a:p>
@@ -9988,7 +9988,7 @@
                 <a:latin typeface="MiSans"/>
                 <a:ea typeface="MiSans"/>
               </a:rPr>
-              <a:t>* Все работы выполняются в строгом соответствии с законодательством Российской Федерации. Договор и закрывающие документы предоставляются.</a:t>
+              <a:t>* Все работы выполняются в строгом соответствии с законодательством Российской Федерации. Договор и закрывающие документы предоставляются. Instagram принадлежит компании Meta, признанной экстремистской организацией и запрещённой на территории Российской Федерации.</a:t>
             </a:r>
             <a:endParaRPr lang="en-US" sz="1050"/>
           </a:p>

--- a/prompter-moscow/presentation/prompter-home.pptx
+++ b/prompter-moscow/presentation/prompter-home.pptx
@@ -9882,7 +9882,7 @@
                 <a:latin typeface="MiSans"/>
                 <a:ea typeface="MiSans"/>
               </a:rPr>
-              <a:t>6 площадок для публикаций</a:t>
+              <a:t>6 площадок для автопубликации</a:t>
             </a:r>
             <a:endParaRPr lang="en-US" sz="1350"/>
           </a:p>
